--- a/decks/geog-living-world/geog-living-world_ch1_what-is-an-ecosystem.pptx
+++ b/decks/geog-living-world/geog-living-world_ch1_what-is-an-ecosystem.pptx
@@ -125,30 +125,30 @@
   <p:extLst>
     <p:ext uri="{521415D9-36F7-43E2-AB2F-B90AF26B5E84}">
       <p14:sectionLst xmlns:p14="http://schemas.microsoft.com/office/powerpoint/2010/main">
-        <p14:section name="Opening" id="{b2dc25c2-8aa5-4027-40e8-3cb58b8cada4}">
+        <p14:section name="Opening" id="{6b6ab11c-9456-c0f6-2cfb-5a3448d1c069}">
           <p14:sldIdLst>
             <p14:sldId id="256"/>
           </p14:sldIdLst>
         </p14:section>
-        <p14:section name="Gate" id="{d59fc6db-b238-7096-7761-5e2485ee26ee}">
+        <p14:section name="Gate" id="{59ac03a4-0d8c-60ff-f7be-664d558f3a07}">
           <p14:sldIdLst>
             <p14:sldId id="257"/>
             <p14:sldId id="258"/>
           </p14:sldIdLst>
         </p14:section>
-        <p14:section name="Pre-teach" id="{8dfe8f0b-8ef7-efed-8a85-f7e8f947c443}">
+        <p14:section name="Pre-teach" id="{c51e076c-390c-d963-a4da-9c400a49555e}">
           <p14:sldIdLst>
             <p14:sldId id="259"/>
             <p14:sldId id="260"/>
           </p14:sldIdLst>
         </p14:section>
-        <p14:section name="Read-along" id="{521ab0ff-0fa3-f491-564c-02c294912095}">
+        <p14:section name="Read-along" id="{a9d85dc3-5318-6a41-e379-0120f140e4c6}">
           <p14:sldIdLst>
             <p14:sldId id="261"/>
             <p14:sldId id="262"/>
           </p14:sldIdLst>
         </p14:section>
-        <p14:section name="Teach" id="{6281d6c5-84c3-a49c-4f3a-9297d8db3eef}">
+        <p14:section name="Teach" id="{d6c72621-e60f-9668-a8cc-5b95d41eb3cc}">
           <p14:sldIdLst>
             <p14:sldId id="263"/>
             <p14:sldId id="264"/>
@@ -156,7 +156,7 @@
             <p14:sldId id="266"/>
           </p14:sldIdLst>
         </p14:section>
-        <p14:section name="Routes" id="{03a83402-48b1-27e4-50ce-6f5b531982e6}">
+        <p14:section name="Routes" id="{c8c20660-f0f8-4ad5-b54f-8887d3d4a7c1}">
           <p14:sldIdLst>
             <p14:sldId id="267"/>
             <p14:sldId id="268"/>
@@ -164,12 +164,12 @@
             <p14:sldId id="270"/>
           </p14:sldIdLst>
         </p14:section>
-        <p14:section name="Close" id="{d26483a1-a9da-f9a1-2388-49f21841c5fd}">
+        <p14:section name="Close" id="{0d3570d4-2f5a-67e6-4a84-d37c9927a957}">
           <p14:sldIdLst>
             <p14:sldId id="271"/>
           </p14:sldIdLst>
         </p14:section>
-        <p14:section name="Answers" id="{ad5a324f-e785-344a-87ee-a2ac0f4e1134}">
+        <p14:section name="Answers" id="{a6ad4b0f-e52a-eee8-8665-0390bba1bd08}">
           <p14:sldIdLst>
             <p14:sldId id="272"/>
             <p14:sldId id="273"/>
@@ -2258,7 +2258,7 @@
             <a:r>
               <a:rPr lang="en-US" dirty="0"/>
               <a:t>Teach — Case study: Epping Forest, East London. Say it in your own words, then check understanding with a quick question: ask a pupil from the pre-teach group first, since they met these words and ideas before the lesson. Pupils try to recall before you re-explain.
-Epping Forest lies in East London. It is what remains of a much larger forest that colonised England at the end of the last Ice Age. Your class annotated a profile of the forest in three layers. In the tree foliage at the top grow the native trees: oak, elm, ash and beech. This layer supports 38 species of birds. Below it is a shrub layer of holly and hazel at about 5 m, and under that a field layer of grasses, brambles, bracken, ferns and flowering plants. The shrub layer is where you might find 20 species of dragonfly. The forest is also home to 177 species of moss and lichen.
+Epping Forest lies in East London. It is the surviving fragment of a far bigger woodland that spread back across England once the last Ice Age ended. Your class annotated a profile of the forest in three layers. In the tree foliage at the top grow the native trees: oak, elm, ash and beech. This layer supports 38 species of birds. Below it is a shrub layer of holly and hazel at about 5 m, and under that a field layer of grasses, brambles, bracken, ferns and flowering plants. The shrub layer is where you might find 20 species of dragonfly. The forest is also home to 177 species of moss and lichen.
 On the forest floor, among the dead leaves and wood, live 700 species of fungi. Mammals, amphibians and reptiles live close to the floor and in the shrub layer. Each layer is a home for different living things, and each depends on the layer above and below: the trees shade the shrubs, the shrubs shelter the insects, and the fungi on the floor recycle everything that falls.
 The forest is your named example of a small-scale UK ecosystem. For a describe question you need its location (East London), its layers, its named species and at least two of the numbers. Learn them; they are the detail that earns the top marks.
 Tip: Learn the Epping Forest numbers as a ladder from the ground up: 700 fungi on the floor, 177 mosses and lichens, 20 dragonflies in the shrubs, 38 birds in the trees.</a:t>
@@ -17392,7 +17392,7 @@
                 <a:ea typeface="Calibri" pitchFamily="34" charset="-122"/>
                 <a:cs typeface="Calibri" pitchFamily="34" charset="-120"/>
               </a:rPr>
-              <a:t>Epping Forest lies in East London. It is what remains of a much larger forest that colonised England at the end of the last Ice Age.</a:t>
+              <a:t>Epping Forest lies in East London. It is the surviving fragment of a far bigger woodland that spread back across England once the last Ice Age ended.</a:t>
             </a:r>
             <a:endParaRPr lang="en-US" sz="2200" dirty="0"/>
           </a:p>
